--- a/outputs/CAMEL-AI_Presentation.pptx
+++ b/outputs/CAMEL-AI_Presentation.pptx
@@ -3108,7 +3108,7 @@
           <a:lstStyle/>
           <a:p>
             <a:r>
-              <a:t>CAMEL-AI</a:t>
+              <a:t>CAMEL-AI Overview</a:t>
             </a:r>
           </a:p>
         </p:txBody>
@@ -3129,7 +3129,7 @@
           <a:lstStyle/>
           <a:p>
             <a:r>
-              <a:t>Building Multi-Agent Systems for Task Automation</a:t>
+              <a:t>A Framework for AI Development and Deployment</a:t>
             </a:r>
           </a:p>
         </p:txBody>
@@ -3168,7 +3168,7 @@
           <a:lstStyle/>
           <a:p>
             <a:r>
-              <a:t>Introduction to CAMEL-AI</a:t>
+              <a:t>What is CAMEL-AI?</a:t>
             </a:r>
           </a:p>
         </p:txBody>
@@ -3190,19 +3190,19 @@
           <a:p>
             <a:pPr/>
             <a:r>
-              <a:t>Open-source community</a:t>
+              <a:t>A framework for developing and deploying AI models.</a:t>
             </a:r>
           </a:p>
           <a:p>
             <a:pPr/>
             <a:r>
-              <a:t>Focus on scaling laws of agents</a:t>
+              <a:t>Focuses on structured approaches to building AI applications.</a:t>
             </a:r>
           </a:p>
           <a:p>
             <a:pPr/>
             <a:r>
-              <a:t>Applications in data generation, world simulation, and task automation</a:t>
+              <a:t>Emphasizes modularity, scalability, and ease of integration.</a:t>
             </a:r>
           </a:p>
         </p:txBody>
@@ -3241,19 +3241,38 @@
           <a:lstStyle/>
           <a:p>
             <a:r>
-              <a:t>Key Features</a:t>
-            </a:r>
-          </a:p>
-        </p:txBody>
-      </p:sp>
-      <p:sp>
-        <p:nvSpPr>
-          <p:cNvPr id="3" name="Content Placeholder 2"/>
-          <p:cNvSpPr>
-            <a:spLocks noGrp="1"/>
-          </p:cNvSpPr>
-          <p:nvPr>
-            <p:ph idx="1"/>
+              <a:t>Key Features of CAMEL-AI</a:t>
+            </a:r>
+          </a:p>
+        </p:txBody>
+      </p:sp>
+      <p:pic>
+        <p:nvPicPr>
+          <p:cNvPr id="3" name="Picture Placeholder 2" descr="image.jpg"/>
+          <p:cNvPicPr>
+            <a:picLocks noGrp="1" noChangeAspect="1"/>
+          </p:cNvPicPr>
+          <p:nvPr>
+            <p:ph type="pic" idx="1"/>
+          </p:nvPr>
+        </p:nvPicPr>
+        <p:blipFill>
+          <a:blip r:embed="rId2"/>
+          <a:srcRect t="25019" b="25019"/>
+          <a:stretch>
+            <a:fillRect/>
+          </a:stretch>
+        </p:blipFill>
+        <p:spPr/>
+      </p:pic>
+      <p:sp>
+        <p:nvSpPr>
+          <p:cNvPr id="4" name="Text Placeholder 3"/>
+          <p:cNvSpPr>
+            <a:spLocks noGrp="1"/>
+          </p:cNvSpPr>
+          <p:nvPr>
+            <p:ph type="body" idx="2" sz="half"/>
           </p:nvPr>
         </p:nvSpPr>
         <p:spPr/>
@@ -3263,19 +3282,25 @@
           <a:p>
             <a:pPr/>
             <a:r>
-              <a:t>Multi-agent systems</a:t>
+              <a:t>Data preprocessing tools</a:t>
             </a:r>
           </a:p>
           <a:p>
             <a:pPr/>
             <a:r>
-              <a:t>Task automation</a:t>
+              <a:t>Model training capabilities</a:t>
             </a:r>
           </a:p>
           <a:p>
             <a:pPr/>
             <a:r>
-              <a:t>Community-driven development</a:t>
+              <a:t>Evaluation metrics and tools</a:t>
+            </a:r>
+          </a:p>
+          <a:p>
+            <a:pPr/>
+            <a:r>
+              <a:t>Deployment options for AI models</a:t>
             </a:r>
           </a:p>
         </p:txBody>
@@ -3314,19 +3339,38 @@
           <a:lstStyle/>
           <a:p>
             <a:r>
-              <a:t>Community and Collaboration</a:t>
-            </a:r>
-          </a:p>
-        </p:txBody>
-      </p:sp>
-      <p:sp>
-        <p:nvSpPr>
-          <p:cNvPr id="3" name="Content Placeholder 2"/>
-          <p:cNvSpPr>
-            <a:spLocks noGrp="1"/>
-          </p:cNvSpPr>
-          <p:nvPr>
-            <p:ph idx="1"/>
+              <a:t>Benefits of Using CAMEL-AI</a:t>
+            </a:r>
+          </a:p>
+        </p:txBody>
+      </p:sp>
+      <p:pic>
+        <p:nvPicPr>
+          <p:cNvPr id="3" name="Picture Placeholder 2" descr="image.jpg"/>
+          <p:cNvPicPr>
+            <a:picLocks noGrp="1" noChangeAspect="1"/>
+          </p:cNvPicPr>
+          <p:nvPr>
+            <p:ph type="pic" idx="1"/>
+          </p:nvPr>
+        </p:nvPicPr>
+        <p:blipFill>
+          <a:blip r:embed="rId2"/>
+          <a:srcRect l="5532" r="5532"/>
+          <a:stretch>
+            <a:fillRect/>
+          </a:stretch>
+        </p:blipFill>
+        <p:spPr/>
+      </p:pic>
+      <p:sp>
+        <p:nvSpPr>
+          <p:cNvPr id="4" name="Text Placeholder 3"/>
+          <p:cNvSpPr>
+            <a:spLocks noGrp="1"/>
+          </p:cNvSpPr>
+          <p:nvPr>
+            <p:ph type="body" idx="2" sz="half"/>
           </p:nvPr>
         </p:nvSpPr>
         <p:spPr/>
@@ -3336,19 +3380,19 @@
           <a:p>
             <a:pPr/>
             <a:r>
-              <a:t>Join the community on Discord</a:t>
+              <a:t>Streamlined AI development process</a:t>
             </a:r>
           </a:p>
           <a:p>
             <a:pPr/>
             <a:r>
-              <a:t>Collaborate on GitHub</a:t>
+              <a:t>Improved collaboration among teams</a:t>
             </a:r>
           </a:p>
           <a:p>
             <a:pPr/>
             <a:r>
-              <a:t>Participate in research and development</a:t>
+              <a:t>Flexibility to integrate with existing systems</a:t>
             </a:r>
           </a:p>
         </p:txBody>
@@ -3387,164 +3431,64 @@
           <a:lstStyle/>
           <a:p>
             <a:r>
-              <a:t>Resources and Tools</a:t>
-            </a:r>
-          </a:p>
-        </p:txBody>
-      </p:sp>
-      <p:sp>
-        <p:nvSpPr>
-          <p:cNvPr id="3" name="Content Placeholder 2"/>
-          <p:cNvSpPr>
-            <a:spLocks noGrp="1"/>
-          </p:cNvSpPr>
-          <p:nvPr>
-            <p:ph idx="1"/>
-          </p:nvPr>
-        </p:nvSpPr>
-        <p:spPr/>
-        <p:txBody>
-          <a:bodyPr/>
-          <a:lstStyle/>
-          <a:p/>
-        </p:txBody>
-      </p:sp>
-      <p:graphicFrame>
-        <p:nvGraphicFramePr>
-          <p:cNvPr id="4" name="Table 3"/>
-          <p:cNvGraphicFramePr>
-            <a:graphicFrameLocks noGrp="1"/>
-          </p:cNvGraphicFramePr>
-          <p:nvPr/>
-        </p:nvGraphicFramePr>
-        <p:xfrm>
-          <a:off x="457200" y="1600200"/>
-          <a:ext cx="8229600" cy="4525963"/>
-        </p:xfrm>
-        <a:graphic>
-          <a:graphicData uri="http://schemas.openxmlformats.org/drawingml/2006/table">
-            <a:tbl>
-              <a:tblPr firstRow="1" bandRow="1">
-                <a:tableStyleId>{5C22544A-7EE6-4342-B048-85BDC9FD1C3A}</a:tableStyleId>
-              </a:tblPr>
-              <a:tblGrid>
-                <a:gridCol w="4114800"/>
-                <a:gridCol w="4114800"/>
-              </a:tblGrid>
-              <a:tr h="1131490">
-                <a:tc>
-                  <a:txBody>
-                    <a:bodyPr/>
-                    <a:lstStyle/>
-                    <a:p>
-                      <a:pPr>
-                        <a:defRPr b="1"/>
-                      </a:pPr>
-                      <a:r>
-                        <a:t>Resource</a:t>
-                      </a:r>
-                    </a:p>
-                  </a:txBody>
-                  <a:tcPr/>
-                </a:tc>
-                <a:tc>
-                  <a:txBody>
-                    <a:bodyPr/>
-                    <a:lstStyle/>
-                    <a:p>
-                      <a:pPr>
-                        <a:defRPr b="1"/>
-                      </a:pPr>
-                      <a:r>
-                        <a:t>Description</a:t>
-                      </a:r>
-                    </a:p>
-                  </a:txBody>
-                  <a:tcPr/>
-                </a:tc>
-              </a:tr>
-              <a:tr h="1131490">
-                <a:tc>
-                  <a:txBody>
-                    <a:bodyPr/>
-                    <a:lstStyle/>
-                    <a:p>
-                      <a:r>
-                        <a:t>GitHub</a:t>
-                      </a:r>
-                    </a:p>
-                  </a:txBody>
-                  <a:tcPr/>
-                </a:tc>
-                <a:tc>
-                  <a:txBody>
-                    <a:bodyPr/>
-                    <a:lstStyle/>
-                    <a:p>
-                      <a:r>
-                        <a:t>Source code and documentation</a:t>
-                      </a:r>
-                    </a:p>
-                  </a:txBody>
-                  <a:tcPr/>
-                </a:tc>
-              </a:tr>
-              <a:tr h="1131490">
-                <a:tc>
-                  <a:txBody>
-                    <a:bodyPr/>
-                    <a:lstStyle/>
-                    <a:p>
-                      <a:r>
-                        <a:t>Discord</a:t>
-                      </a:r>
-                    </a:p>
-                  </a:txBody>
-                  <a:tcPr/>
-                </a:tc>
-                <a:tc>
-                  <a:txBody>
-                    <a:bodyPr/>
-                    <a:lstStyle/>
-                    <a:p>
-                      <a:r>
-                        <a:t>Community discussions and support</a:t>
-                      </a:r>
-                    </a:p>
-                  </a:txBody>
-                  <a:tcPr/>
-                </a:tc>
-              </a:tr>
-              <a:tr h="1131493">
-                <a:tc>
-                  <a:txBody>
-                    <a:bodyPr/>
-                    <a:lstStyle/>
-                    <a:p>
-                      <a:r>
-                        <a:t>MCP Hub</a:t>
-                      </a:r>
-                    </a:p>
-                  </a:txBody>
-                  <a:tcPr/>
-                </a:tc>
-                <a:tc>
-                  <a:txBody>
-                    <a:bodyPr/>
-                    <a:lstStyle/>
-                    <a:p>
-                      <a:r>
-                        <a:t>Research and development hub</a:t>
-                      </a:r>
-                    </a:p>
-                  </a:txBody>
-                  <a:tcPr/>
-                </a:tc>
-              </a:tr>
-            </a:tbl>
-          </a:graphicData>
-        </a:graphic>
-      </p:graphicFrame>
+              <a:t>Use Cases</a:t>
+            </a:r>
+          </a:p>
+        </p:txBody>
+      </p:sp>
+      <p:pic>
+        <p:nvPicPr>
+          <p:cNvPr id="3" name="Picture Placeholder 2" descr="image.jpg"/>
+          <p:cNvPicPr>
+            <a:picLocks noGrp="1" noChangeAspect="1"/>
+          </p:cNvPicPr>
+          <p:nvPr>
+            <p:ph type="pic" idx="1"/>
+          </p:nvPr>
+        </p:nvPicPr>
+        <p:blipFill>
+          <a:blip r:embed="rId2"/>
+          <a:srcRect t="25019" b="25019"/>
+          <a:stretch>
+            <a:fillRect/>
+          </a:stretch>
+        </p:blipFill>
+        <p:spPr/>
+      </p:pic>
+      <p:sp>
+        <p:nvSpPr>
+          <p:cNvPr id="4" name="Text Placeholder 3"/>
+          <p:cNvSpPr>
+            <a:spLocks noGrp="1"/>
+          </p:cNvSpPr>
+          <p:nvPr>
+            <p:ph type="body" idx="2" sz="half"/>
+          </p:nvPr>
+        </p:nvSpPr>
+        <p:spPr/>
+        <p:txBody>
+          <a:bodyPr/>
+          <a:lstStyle/>
+          <a:p>
+            <a:pPr/>
+            <a:r>
+              <a:t>Enterprise AI solutions</a:t>
+            </a:r>
+          </a:p>
+          <a:p>
+            <a:pPr/>
+            <a:r>
+              <a:t>Research and development in AI</a:t>
+            </a:r>
+          </a:p>
+          <a:p>
+            <a:pPr/>
+            <a:r>
+              <a:t>Integration with IoT and big data systems</a:t>
+            </a:r>
+          </a:p>
+        </p:txBody>
+      </p:sp>
     </p:spTree>
   </p:cSld>
   <p:clrMapOvr>
